--- a/docs/decks/Code_Workflow.pptx
+++ b/docs/decks/Code_Workflow.pptx
@@ -3301,7 +3301,7 @@
                   <a:srgbClr val="999999"/>
                 </a:solidFill>
               </a:rPr>
-              <a:t>code v1.4  ·  2026-07-12  ·  1/12</a:t>
+              <a:t>code v1.5  ·  2026-07-13  ·  1/12</a:t>
             </a:r>
           </a:p>
         </p:txBody>
@@ -3410,7 +3410,7 @@
         </p:nvGraphicFramePr>
         <p:xfrm>
           <a:off x="457200" y="1737360"/>
-          <a:ext cx="11247120" cy="4169664"/>
+          <a:ext cx="11247120" cy="4864608"/>
         </p:xfrm>
         <a:graphic>
           <a:graphicData uri="http://schemas.openxmlformats.org/drawingml/2006/table">
@@ -3919,7 +3919,7 @@
                     <a:p>
                       <a:r>
                         <a:rPr sz="1100"/>
-                        <a:t>Rate vs local hour (multi-day)</a:t>
+                        <a:t>Rate vs local hour (exposure-normalized)</a:t>
                       </a:r>
                     </a:p>
                   </a:txBody>
@@ -3939,6 +3939,78 @@
                   <a:tcPr/>
                 </a:tc>
               </a:tr>
+              <a:tr h="347472">
+                <a:tc>
+                  <a:txBody>
+                    <a:bodyPr/>
+                    <a:lstStyle/>
+                    <a:p>
+                      <a:r>
+                        <a:rPr sz="1100" b="1"/>
+                        <a:t>python diurnal.py --class aircraft</a:t>
+                      </a:r>
+                    </a:p>
+                  </a:txBody>
+                  <a:tcPr/>
+                </a:tc>
+                <a:tc>
+                  <a:txBody>
+                    <a:bodyPr/>
+                    <a:lstStyle/>
+                    <a:p>
+                      <a:r>
+                        <a:rPr sz="1100"/>
+                        <a:t>The CONTROL: aircraft have a human</a:t>
+                      </a:r>
+                    </a:p>
+                  </a:txBody>
+                  <a:tcPr/>
+                </a:tc>
+                <a:tc>
+                  <a:txBody>
+                    <a:bodyPr/>
+                    <a:lstStyle/>
+                    <a:p>
+                      <a:r>
+                        <a:rPr sz="1100"/>
+                        <a:t>diurnal.png</a:t>
+                      </a:r>
+                    </a:p>
+                  </a:txBody>
+                  <a:tcPr/>
+                </a:tc>
+              </a:tr>
+              <a:tr h="347472">
+                <a:tc>
+                  <a:txBody>
+                    <a:bodyPr/>
+                    <a:lstStyle/>
+                    <a:p/>
+                  </a:txBody>
+                  <a:tcPr/>
+                </a:tc>
+                <a:tc>
+                  <a:txBody>
+                    <a:bodyPr/>
+                    <a:lstStyle/>
+                    <a:p>
+                      <a:r>
+                        <a:rPr sz="1100"/>
+                        <a:t>daily rhythm, not a meteor one</a:t>
+                      </a:r>
+                    </a:p>
+                  </a:txBody>
+                  <a:tcPr/>
+                </a:tc>
+                <a:tc>
+                  <a:txBody>
+                    <a:bodyPr/>
+                    <a:lstStyle/>
+                    <a:p/>
+                  </a:txBody>
+                  <a:tcPr/>
+                </a:tc>
+              </a:tr>
             </a:tbl>
           </a:graphicData>
         </a:graphic>
@@ -4005,7 +4077,7 @@
                   <a:srgbClr val="999999"/>
                 </a:solidFill>
               </a:rPr>
-              <a:t>code v1.4  ·  2026-07-12  ·  10/12</a:t>
+              <a:t>code v1.5  ·  2026-07-13  ·  10/12</a:t>
             </a:r>
           </a:p>
         </p:txBody>
@@ -4369,7 +4441,7 @@
                   <a:srgbClr val="999999"/>
                 </a:solidFill>
               </a:rPr>
-              <a:t>code v1.4  ·  2026-07-12  ·  11/12</a:t>
+              <a:t>code v1.5  ·  2026-07-13  ·  11/12</a:t>
             </a:r>
           </a:p>
         </p:txBody>
@@ -4658,7 +4730,7 @@
                   <a:srgbClr val="999999"/>
                 </a:solidFill>
               </a:rPr>
-              <a:t>code v1.4  ·  2026-07-12  ·  12/12</a:t>
+              <a:t>code v1.5  ·  2026-07-13  ·  12/12</a:t>
             </a:r>
           </a:p>
         </p:txBody>
@@ -5481,7 +5553,7 @@
                   <a:srgbClr val="999999"/>
                 </a:solidFill>
               </a:rPr>
-              <a:t>code v1.4  ·  2026-07-12  ·  2/12</a:t>
+              <a:t>code v1.5  ·  2026-07-13  ·  2/12</a:t>
             </a:r>
           </a:p>
         </p:txBody>
@@ -5875,7 +5947,7 @@
                   <a:srgbClr val="999999"/>
                 </a:solidFill>
               </a:rPr>
-              <a:t>code v1.4  ·  2026-07-12  ·  3/12</a:t>
+              <a:t>code v1.5  ·  2026-07-13  ·  3/12</a:t>
             </a:r>
           </a:p>
         </p:txBody>
@@ -6567,7 +6639,7 @@
                   <a:srgbClr val="999999"/>
                 </a:solidFill>
               </a:rPr>
-              <a:t>code v1.4  ·  2026-07-12  ·  4/12</a:t>
+              <a:t>code v1.5  ·  2026-07-13  ·  4/12</a:t>
             </a:r>
           </a:p>
         </p:txBody>
@@ -6886,7 +6958,7 @@
                   <a:srgbClr val="999999"/>
                 </a:solidFill>
               </a:rPr>
-              <a:t>code v1.4  ·  2026-07-12  ·  5/12</a:t>
+              <a:t>code v1.5  ·  2026-07-13  ·  5/12</a:t>
             </a:r>
           </a:p>
         </p:txBody>
@@ -7205,7 +7277,7 @@
                   <a:srgbClr val="999999"/>
                 </a:solidFill>
               </a:rPr>
-              <a:t>code v1.4  ·  2026-07-12  ·  6/12</a:t>
+              <a:t>code v1.5  ·  2026-07-13  ·  6/12</a:t>
             </a:r>
           </a:p>
         </p:txBody>
@@ -7494,7 +7566,7 @@
                   <a:srgbClr val="999999"/>
                 </a:solidFill>
               </a:rPr>
-              <a:t>code v1.4  ·  2026-07-12  ·  7/12</a:t>
+              <a:t>code v1.5  ·  2026-07-13  ·  7/12</a:t>
             </a:r>
           </a:p>
         </p:txBody>
@@ -7843,7 +7915,7 @@
                   <a:srgbClr val="999999"/>
                 </a:solidFill>
               </a:rPr>
-              <a:t>code v1.4  ·  2026-07-12  ·  8/12</a:t>
+              <a:t>code v1.5  ·  2026-07-13  ·  8/12</a:t>
             </a:r>
           </a:p>
         </p:txBody>
@@ -8065,6 +8137,66 @@
                   <a:srgbClr val="222222"/>
                 </a:solidFill>
               </a:rPr>
+              <a:t>- sessions.csv (v1.5) -- the EXPOSURE log: append-only on/beat/off rows saying</a:t>
+            </a:r>
+          </a:p>
+          <a:p>
+            <a:pPr lvl="1">
+              <a:spcAft>
+                <a:spcPts val="400"/>
+              </a:spcAft>
+            </a:pPr>
+            <a:r>
+              <a:rPr sz="1500">
+                <a:solidFill>
+                  <a:srgbClr val="555555"/>
+                </a:solidFill>
+              </a:rPr>
+              <a:t>  . when the receiver was actually detecting (excludes warm-up + reconnect gaps).</a:t>
+            </a:r>
+          </a:p>
+          <a:p>
+            <a:pPr lvl="1">
+              <a:spcAft>
+                <a:spcPts val="400"/>
+              </a:spcAft>
+            </a:pPr>
+            <a:r>
+              <a:rPr sz="1500">
+                <a:solidFill>
+                  <a:srgbClr val="555555"/>
+                </a:solidFill>
+              </a:rPr>
+              <a:t>  . Every RATE divides by this. Without it, exposure has to be guessed -- and a</a:t>
+            </a:r>
+          </a:p>
+          <a:p>
+            <a:pPr lvl="1">
+              <a:spcAft>
+                <a:spcPts val="400"/>
+              </a:spcAft>
+            </a:pPr>
+            <a:r>
+              <a:rPr sz="1500">
+                <a:solidFill>
+                  <a:srgbClr val="555555"/>
+                </a:solidFill>
+              </a:rPr>
+              <a:t>  . night-only schedule then fabricates a textbook diurnal curve. See uptime.py.</a:t>
+            </a:r>
+          </a:p>
+          <a:p>
+            <a:pPr>
+              <a:spcAft>
+                <a:spcPts val="400"/>
+              </a:spcAft>
+            </a:pPr>
+            <a:r>
+              <a:rPr sz="1700">
+                <a:solidFill>
+                  <a:srgbClr val="222222"/>
+                </a:solidFill>
+              </a:rPr>
               <a:t>- Diagnostics: monitor_power.png / monitor_waterfall.png, spectrograph.png.</a:t>
             </a:r>
           </a:p>
@@ -8095,7 +8227,7 @@
                   <a:srgbClr val="222222"/>
                 </a:solidFill>
               </a:rPr>
-              <a:t>- Everything downstream keys off meteor_events.csv + snapshots/ -- stable contract.</a:t>
+              <a:t>- Everything downstream keys off meteor_events.csv + sessions.csv + snapshots/.</a:t>
             </a:r>
           </a:p>
         </p:txBody>
@@ -8162,7 +8294,7 @@
                   <a:srgbClr val="999999"/>
                 </a:solidFill>
               </a:rPr>
-              <a:t>code v1.4  ·  2026-07-12  ·  9/12</a:t>
+              <a:t>code v1.5  ·  2026-07-13  ·  9/12</a:t>
             </a:r>
           </a:p>
         </p:txBody>
